--- a/kahi/2026-10-24_kahi-lumumba-linkedin-instagram-analyse-veille-strategie.pptx
+++ b/kahi/2026-10-24_kahi-lumumba-linkedin-instagram-analyse-veille-strategie.pptx
@@ -6744,7 +6744,7 @@
                 </a:solidFill>
                 <a:latin typeface="Montserrat"/>
               </a:rPr>
-              <a:t>le mardi à 9 h, son créneau le plus fréquent, et le jeudi à 9 h les semaines de temps fort, puis on compare au bout de huit semaines sur ses propres chiffres.</a:t>
+              <a:t>le mardi à 9 h (3 de ses posts, dont l'annonce WHO) et le jeudi à 9 h, le vendredi restant réservé aux remerciements après un événement. On compare au bout de huit semaines, sur ses propres chiffres.</a:t>
             </a:r>
           </a:p>
         </p:txBody>
@@ -9818,7 +9818,7 @@
                 </a:solidFill>
                 <a:latin typeface="Montserrat"/>
               </a:rPr>
-              <a:t>11 stories à la une · 0 publication épinglée · compte personnel, catégorie « Entrepreneur »</a:t>
+              <a:t>11 stories à la une · 0 publication épinglée · catégorie affichée : « Entrepreneur »</a:t>
             </a:r>
           </a:p>
         </p:txBody>
@@ -9980,7 +9980,7 @@
                 </a:solidFill>
                 <a:latin typeface="Montserrat"/>
               </a:rPr>
-              <a:t>Un compte « personnel », </a:t>
+              <a:t>Ses statistiques existent déjà : </a:t>
             </a:r>
             <a:r>
               <a:rPr sz="1200">
@@ -9989,7 +9989,7 @@
                 </a:solidFill>
                 <a:latin typeface="Montserrat"/>
               </a:rPr>
-              <a:t>pas « créateur » : il ne donne pas accès aux statistiques détaillées (portée, visites, abonnés gagnés).</a:t>
+              <a:t>la catégorie affichée montre un compte professionnel. Portée, visites et abonnés gagnés se lisent dans l'application, mais pas de l'extérieur.</a:t>
             </a:r>
           </a:p>
         </p:txBody>
@@ -10028,7 +10028,7 @@
                 </a:solidFill>
                 <a:latin typeface="Montserrat"/>
               </a:rPr>
-              <a:t>Profil relevé le 24/10/2026. Le type de compte est celui qu'affiche Instagram publiquement.</a:t>
+              <a:t>Profil relevé le 24/10/2026.</a:t>
             </a:r>
           </a:p>
         </p:txBody>
@@ -11115,7 +11115,7 @@
                 </a:solidFill>
                 <a:latin typeface="Montserrat"/>
               </a:rPr>
-              <a:t>Ce qui marche sur Instagram : WHO, le podcast quand il sort du cadre, lui</a:t>
+              <a:t>Ce qui marche sur Instagram : WHO et les invités connus</a:t>
             </a:r>
           </a:p>
         </p:txBody>
@@ -17570,8 +17570,8 @@
         </p:blipFill>
         <p:spPr>
           <a:xfrm>
-            <a:off x="6702552" y="0"/>
-            <a:ext cx="5486400" cy="6858000"/>
+            <a:off x="6702552" y="685800"/>
+            <a:ext cx="5486400" cy="5486400"/>
           </a:xfrm>
           <a:prstGeom prst="rect">
             <a:avLst/>
@@ -18065,8 +18065,47 @@
         </p:nvSpPr>
         <p:spPr>
           <a:xfrm>
-            <a:off x="868680" y="1572768"/>
-            <a:ext cx="10424160" cy="1143000"/>
+            <a:off x="868680" y="1481328"/>
+            <a:ext cx="2743200" cy="274320"/>
+          </a:xfrm>
+          <a:prstGeom prst="rect">
+            <a:avLst/>
+          </a:prstGeom>
+          <a:noFill/>
+        </p:spPr>
+        <p:txBody>
+          <a:bodyPr wrap="square" lIns="18288" rIns="18288" tIns="18288" bIns="18288" anchor="t">
+            <a:spAutoFit/>
+          </a:bodyPr>
+          <a:lstStyle/>
+          <a:p>
+            <a:pPr algn="l">
+              <a:lnSpc>
+                <a:spcPct val="112000"/>
+              </a:lnSpc>
+            </a:pPr>
+            <a:r>
+              <a:rPr sz="900" b="1" i="0">
+                <a:solidFill>
+                  <a:srgbClr val="B6D401"/>
+                </a:solidFill>
+                <a:latin typeface="Montserrat"/>
+              </a:rPr>
+              <a:t>PROPOSITION DE SIGNATURE</a:t>
+            </a:r>
+          </a:p>
+        </p:txBody>
+      </p:sp>
+      <p:sp>
+        <p:nvSpPr>
+          <p:cNvPr id="8" name="TextBox 7"/>
+          <p:cNvSpPr txBox="1"/>
+          <p:nvPr/>
+        </p:nvSpPr>
+        <p:spPr>
+          <a:xfrm>
+            <a:off x="868680" y="1691640"/>
+            <a:ext cx="10424160" cy="1051560"/>
           </a:xfrm>
           <a:prstGeom prst="rect">
             <a:avLst/>
@@ -18098,7 +18137,7 @@
       </p:sp>
       <p:sp>
         <p:nvSpPr>
-          <p:cNvPr id="8" name="Rectangle 7"/>
+          <p:cNvPr id="9" name="Rectangle 8"/>
           <p:cNvSpPr/>
           <p:nvPr/>
         </p:nvSpPr>
@@ -18144,7 +18183,7 @@
       </p:sp>
       <p:pic>
         <p:nvPicPr>
-          <p:cNvPr id="9" name="Picture 8" descr="ic_linkedin_noir.png"/>
+          <p:cNvPr id="10" name="Picture 9" descr="ic_linkedin_noir.png"/>
           <p:cNvPicPr>
             <a:picLocks noChangeAspect="1"/>
           </p:cNvPicPr>
@@ -18168,7 +18207,7 @@
       </p:pic>
       <p:sp>
         <p:nvSpPr>
-          <p:cNvPr id="10" name="TextBox 9"/>
+          <p:cNvPr id="11" name="TextBox 10"/>
           <p:cNvSpPr txBox="1"/>
           <p:nvPr/>
         </p:nvSpPr>
@@ -18207,7 +18246,7 @@
       </p:sp>
       <p:sp>
         <p:nvSpPr>
-          <p:cNvPr id="11" name="TextBox 10"/>
+          <p:cNvPr id="12" name="TextBox 11"/>
           <p:cNvSpPr txBox="1"/>
           <p:nvPr/>
         </p:nvSpPr>
@@ -18246,7 +18285,7 @@
       </p:sp>
       <p:sp>
         <p:nvSpPr>
-          <p:cNvPr id="12" name="Rectangle 11"/>
+          <p:cNvPr id="13" name="Rectangle 12"/>
           <p:cNvSpPr/>
           <p:nvPr/>
         </p:nvSpPr>
@@ -18292,7 +18331,7 @@
       </p:sp>
       <p:pic>
         <p:nvPicPr>
-          <p:cNvPr id="13" name="Picture 12" descr="ic_instagram_noir.png"/>
+          <p:cNvPr id="14" name="Picture 13" descr="ic_instagram_noir.png"/>
           <p:cNvPicPr>
             <a:picLocks noChangeAspect="1"/>
           </p:cNvPicPr>
@@ -18316,7 +18355,7 @@
       </p:pic>
       <p:sp>
         <p:nvSpPr>
-          <p:cNvPr id="14" name="TextBox 13"/>
+          <p:cNvPr id="15" name="TextBox 14"/>
           <p:cNvSpPr txBox="1"/>
           <p:nvPr/>
         </p:nvSpPr>
@@ -18355,7 +18394,7 @@
       </p:sp>
       <p:sp>
         <p:nvSpPr>
-          <p:cNvPr id="15" name="TextBox 14"/>
+          <p:cNvPr id="16" name="TextBox 15"/>
           <p:cNvSpPr txBox="1"/>
           <p:nvPr/>
         </p:nvSpPr>
@@ -18394,7 +18433,7 @@
       </p:sp>
       <p:sp>
         <p:nvSpPr>
-          <p:cNvPr id="16" name="TextBox 15"/>
+          <p:cNvPr id="17" name="TextBox 16"/>
           <p:cNvSpPr txBox="1"/>
           <p:nvPr/>
         </p:nvSpPr>
@@ -18433,7 +18472,7 @@
       </p:sp>
       <p:sp>
         <p:nvSpPr>
-          <p:cNvPr id="17" name="TextBox 16"/>
+          <p:cNvPr id="18" name="TextBox 17"/>
           <p:cNvSpPr txBox="1"/>
           <p:nvPr/>
         </p:nvSpPr>
@@ -20959,7 +20998,7 @@
                 </a:solidFill>
                 <a:latin typeface="Montserrat"/>
               </a:rPr>
-              <a:t>comme l'annonce WHO. Pas seulement « ⌛️⌛️⌛️ ».</a:t>
+              <a:t>comme l'annonce WHO, et non trois émojis seuls comme le 11 avril.</a:t>
             </a:r>
           </a:p>
           <a:p>
@@ -21061,7 +21100,7 @@
                 </a:solidFill>
                 <a:latin typeface="Montserrat"/>
               </a:rPr>
-              <a:t>Passer en compte « créateur » : </a:t>
+              <a:t>Lire ses statistiques chaque mois : </a:t>
             </a:r>
             <a:r>
               <a:rPr sz="1250">
@@ -21070,7 +21109,7 @@
                 </a:solidFill>
                 <a:latin typeface="Montserrat"/>
               </a:rPr>
-              <a:t>c'est gratuit et donne enfin les statistiques de portée et d'abonnés gagnés.</a:t>
+              <a:t>portée, visites du profil, abonnés gagnés. Une capture d'écran suffit pour suivre l'effet des nouveaux posts.</a:t>
             </a:r>
           </a:p>
         </p:txBody>
@@ -23045,8 +23084,8 @@
         </p:blipFill>
         <p:spPr>
           <a:xfrm>
-            <a:off x="6702552" y="0"/>
-            <a:ext cx="5486400" cy="6858000"/>
+            <a:off x="6702552" y="685800"/>
+            <a:ext cx="5486400" cy="5486400"/>
           </a:xfrm>
           <a:prstGeom prst="rect">
             <a:avLst/>
@@ -24818,7 +24857,7 @@
                 </a:solidFill>
                 <a:latin typeface="Montserrat"/>
               </a:rPr>
-              <a:t>épingler les trois posts (WHO, merci ADICOM, meilleur épisode) et passer le compte en « créateur ».</a:t>
+              <a:t>épingler les trois posts (WHO, merci ADICOM, meilleur épisode) et remplacer le lien de juillet.</a:t>
             </a:r>
           </a:p>
         </p:txBody>
@@ -26128,7 +26167,7 @@
                 </a:solidFill>
                 <a:latin typeface="Montserrat"/>
               </a:rPr>
-              <a:t>Neti na film. Et ce n'est que le premier.</a:t>
+              <a:t>Neti na film, comme on dit chez moi.</a:t>
             </a:r>
           </a:p>
           <a:p>
@@ -26290,7 +26329,7 @@
                 </a:solidFill>
                 <a:latin typeface="Montserrat"/>
               </a:rPr>
-              <a:t>Visuel : une image de la sortie africaine de WHO publiée par Totem (13/06), ou mieux, une photo de lui à l'avant-première.</a:t>
+              <a:t>Visuel : l'affiche de WHO publiée par Kahi le 1er mai (ci-dessus), ou mieux, une photo de lui à l'avant-première africaine.</a:t>
             </a:r>
           </a:p>
         </p:txBody>
@@ -26436,7 +26475,7 @@
                 </a:solidFill>
                 <a:latin typeface="Montserrat"/>
               </a:rPr>
-              <a:t>126 mots. À valider par Kahi avant toute publication.</a:t>
+              <a:t>125 mots. À valider par Kahi avant toute publication.</a:t>
             </a:r>
           </a:p>
         </p:txBody>
@@ -27732,7 +27771,7 @@
                 </a:solidFill>
                 <a:latin typeface="Montserrat"/>
               </a:rPr>
-              <a:t>10 photos à fournir par l'équipe ADICOM : une par édition, Kahi présent sur au moins la moitié.</a:t>
+              <a:t>10 photos à fournir par l'équipe ADICOM : une par édition, Kahi présent sur au moins la moitié. Différent du carrousel du 30 avril (159 J'aime), centré sur la seule 10e édition.</a:t>
             </a:r>
           </a:p>
         </p:txBody>
@@ -28006,7 +28045,7 @@
                 </a:solidFill>
                 <a:latin typeface="Montserrat"/>
               </a:rPr>
-              <a:t>Merci à chacun de vous. Swipe jusqu'à la dernière image : c'est la photo que je préfère.</a:t>
+              <a:t>Merci à chacun de vous. Faites défiler jusqu'à la dernière image : c'est la photo que je préfère.</a:t>
             </a:r>
           </a:p>
           <a:p>
@@ -28788,7 +28827,7 @@
                 </a:solidFill>
                 <a:latin typeface="Montserrat"/>
               </a:rPr>
-              <a:t>Cinq ans de travail dans l'ombre, et ce soir-là, une salle pleine.</a:t>
+              <a:t>Cinq ans de travail dans l'ombre, et ce soir-là, un accueil que je n'oublierai pas.</a:t>
             </a:r>
           </a:p>
           <a:p>
@@ -28820,7 +28859,7 @@
                 </a:solidFill>
                 <a:latin typeface="Montserrat"/>
               </a:rPr>
-              <a:t>Merci @wilaime et toute l'équipe de @chaquedetailproductions. Ce n'est que le début.</a:t>
+              <a:t>Merci @wilaime et toute l'équipe de @chaquedetailproductions.</a:t>
             </a:r>
           </a:p>
           <a:p>
@@ -29308,7 +29347,7 @@
                           </a:solidFill>
                           <a:latin typeface="Montserrat"/>
                         </a:rPr>
-                        <a:t>Nouveau titre, résumé et bio ; 3 publications épinglées ; compte créateur</a:t>
+                        <a:t>Nouveau titre, résumé et bio ; 3 publications épinglées ; nouveau lien en bio</a:t>
                       </a:r>
                     </a:p>
                   </a:txBody>
@@ -30069,8 +30108,8 @@
         </p:blipFill>
         <p:spPr>
           <a:xfrm>
-            <a:off x="6702552" y="0"/>
-            <a:ext cx="5486400" cy="6858000"/>
+            <a:off x="6702552" y="685800"/>
+            <a:ext cx="5486400" cy="5486400"/>
           </a:xfrm>
           <a:prstGeom prst="rect">
             <a:avLst/>
@@ -30951,7 +30990,7 @@
                 </a:solidFill>
                 <a:latin typeface="Montserrat"/>
               </a:rPr>
-              <a:t>Une capture par mois de ses statistiques LinkedIn, et d'Instagram une fois passé en compte créateur.</a:t>
+              <a:t>Une capture par mois de ses statistiques LinkedIn et Instagram, que seul Kahi peut voir.</a:t>
             </a:r>
           </a:p>
         </p:txBody>
@@ -35479,8 +35518,8 @@
         </p:blipFill>
         <p:spPr>
           <a:xfrm>
-            <a:off x="6702552" y="0"/>
-            <a:ext cx="5486400" cy="6858000"/>
+            <a:off x="6702552" y="685800"/>
+            <a:ext cx="5486400" cy="5486400"/>
           </a:xfrm>
           <a:prstGeom prst="rect">
             <a:avLst/>

--- a/kahi/2026-10-24_kahi-lumumba-linkedin-instagram-analyse-veille-strategie.pptx
+++ b/kahi/2026-10-24_kahi-lumumba-linkedin-instagram-analyse-veille-strategie.pptx
@@ -3277,32 +3277,48 @@
         <p:spPr>
           <a:xfrm>
             <a:off x="731520" y="2240280"/>
-            <a:ext cx="5760720" cy="1463040"/>
-          </a:xfrm>
-          <a:prstGeom prst="rect">
-            <a:avLst/>
-          </a:prstGeom>
-          <a:noFill/>
-        </p:spPr>
-        <p:txBody>
-          <a:bodyPr wrap="square" lIns="18288" rIns="18288" tIns="18288" bIns="18288" anchor="t">
-            <a:spAutoFit/>
-          </a:bodyPr>
-          <a:lstStyle/>
-          <a:p>
-            <a:pPr algn="l">
-              <a:lnSpc>
-                <a:spcPct val="112000"/>
-              </a:lnSpc>
-            </a:pPr>
-            <a:r>
-              <a:rPr sz="4400" b="1" i="0">
+            <a:ext cx="5760720" cy="1371600"/>
+          </a:xfrm>
+          <a:prstGeom prst="rect">
+            <a:avLst/>
+          </a:prstGeom>
+          <a:noFill/>
+        </p:spPr>
+        <p:txBody>
+          <a:bodyPr wrap="square" lIns="18288" rIns="18288" tIns="18288" bIns="18288" anchor="t">
+            <a:spAutoFit/>
+          </a:bodyPr>
+          <a:lstStyle/>
+          <a:p>
+            <a:pPr algn="l">
+              <a:lnSpc>
+                <a:spcPct val="100000"/>
+              </a:lnSpc>
+            </a:pPr>
+            <a:r>
+              <a:rPr sz="4200" b="1" i="0">
                 <a:solidFill>
                   <a:srgbClr val="FFFFFF"/>
                 </a:solidFill>
                 <a:latin typeface="Montserrat"/>
               </a:rPr>
-              <a:t>Kahi Lumumba en ligne</a:t>
+              <a:t>Kahi Lumumba</a:t>
+            </a:r>
+          </a:p>
+          <a:p>
+            <a:pPr algn="l">
+              <a:lnSpc>
+                <a:spcPct val="100000"/>
+              </a:lnSpc>
+            </a:pPr>
+            <a:r>
+              <a:rPr sz="4200" b="1" i="0">
+                <a:solidFill>
+                  <a:srgbClr val="FFFFFF"/>
+                </a:solidFill>
+                <a:latin typeface="Montserrat"/>
+              </a:rPr>
+              <a:t>en ligne</a:t>
             </a:r>
           </a:p>
         </p:txBody>
@@ -3315,7 +3331,7 @@
         </p:nvSpPr>
         <p:spPr>
           <a:xfrm>
-            <a:off x="731520" y="3611880"/>
+            <a:off x="731520" y="3703320"/>
             <a:ext cx="5669280" cy="1097280"/>
           </a:xfrm>
           <a:prstGeom prst="rect">
@@ -8971,27 +8987,27 @@
         </p:nvSpPr>
         <p:spPr>
           <a:xfrm>
-            <a:off x="731520" y="3063240"/>
-            <a:ext cx="5669280" cy="914400"/>
-          </a:xfrm>
-          <a:prstGeom prst="rect">
-            <a:avLst/>
-          </a:prstGeom>
-          <a:noFill/>
-        </p:spPr>
-        <p:txBody>
-          <a:bodyPr wrap="square" lIns="18288" rIns="18288" tIns="18288" bIns="18288" anchor="t">
-            <a:spAutoFit/>
-          </a:bodyPr>
-          <a:lstStyle/>
-          <a:p>
-            <a:pPr algn="l">
-              <a:lnSpc>
-                <a:spcPct val="112000"/>
-              </a:lnSpc>
-            </a:pPr>
-            <a:r>
-              <a:rPr sz="4000" b="1" i="0">
+            <a:off x="731520" y="2926080"/>
+            <a:ext cx="5760720" cy="1371600"/>
+          </a:xfrm>
+          <a:prstGeom prst="rect">
+            <a:avLst/>
+          </a:prstGeom>
+          <a:noFill/>
+        </p:spPr>
+        <p:txBody>
+          <a:bodyPr wrap="square" lIns="18288" rIns="18288" tIns="18288" bIns="18288" anchor="t">
+            <a:spAutoFit/>
+          </a:bodyPr>
+          <a:lstStyle/>
+          <a:p>
+            <a:pPr algn="l">
+              <a:lnSpc>
+                <a:spcPct val="100000"/>
+              </a:lnSpc>
+            </a:pPr>
+            <a:r>
+              <a:rPr sz="3400" b="1" i="0">
                 <a:solidFill>
                   <a:srgbClr val="FFFFFF"/>
                 </a:solidFill>
@@ -9010,7 +9026,7 @@
         </p:nvSpPr>
         <p:spPr>
           <a:xfrm>
-            <a:off x="731520" y="4069080"/>
+            <a:off x="731520" y="4434840"/>
             <a:ext cx="5486400" cy="1280160"/>
           </a:xfrm>
           <a:prstGeom prst="rect">
@@ -9030,7 +9046,7 @@
               </a:lnSpc>
             </a:pPr>
             <a:r>
-              <a:rPr sz="1600" b="0" i="0">
+              <a:rPr sz="1500" b="0" i="0">
                 <a:solidFill>
                   <a:srgbClr val="A1A1A8"/>
                 </a:solidFill>
@@ -14769,27 +14785,27 @@
         </p:nvSpPr>
         <p:spPr>
           <a:xfrm>
-            <a:off x="731520" y="3063240"/>
-            <a:ext cx="5669280" cy="914400"/>
-          </a:xfrm>
-          <a:prstGeom prst="rect">
-            <a:avLst/>
-          </a:prstGeom>
-          <a:noFill/>
-        </p:spPr>
-        <p:txBody>
-          <a:bodyPr wrap="square" lIns="18288" rIns="18288" tIns="18288" bIns="18288" anchor="t">
-            <a:spAutoFit/>
-          </a:bodyPr>
-          <a:lstStyle/>
-          <a:p>
-            <a:pPr algn="l">
-              <a:lnSpc>
-                <a:spcPct val="112000"/>
-              </a:lnSpc>
-            </a:pPr>
-            <a:r>
-              <a:rPr sz="4000" b="1" i="0">
+            <a:off x="731520" y="2926080"/>
+            <a:ext cx="5760720" cy="1371600"/>
+          </a:xfrm>
+          <a:prstGeom prst="rect">
+            <a:avLst/>
+          </a:prstGeom>
+          <a:noFill/>
+        </p:spPr>
+        <p:txBody>
+          <a:bodyPr wrap="square" lIns="18288" rIns="18288" tIns="18288" bIns="18288" anchor="t">
+            <a:spAutoFit/>
+          </a:bodyPr>
+          <a:lstStyle/>
+          <a:p>
+            <a:pPr algn="l">
+              <a:lnSpc>
+                <a:spcPct val="100000"/>
+              </a:lnSpc>
+            </a:pPr>
+            <a:r>
+              <a:rPr sz="3400" b="1" i="0">
                 <a:solidFill>
                   <a:srgbClr val="FFFFFF"/>
                 </a:solidFill>
@@ -14808,7 +14824,7 @@
         </p:nvSpPr>
         <p:spPr>
           <a:xfrm>
-            <a:off x="731520" y="4069080"/>
+            <a:off x="731520" y="4434840"/>
             <a:ext cx="5486400" cy="1280160"/>
           </a:xfrm>
           <a:prstGeom prst="rect">
@@ -14828,7 +14844,7 @@
               </a:lnSpc>
             </a:pPr>
             <a:r>
-              <a:rPr sz="1600" b="0" i="0">
+              <a:rPr sz="1500" b="0" i="0">
                 <a:solidFill>
                   <a:srgbClr val="A1A1A8"/>
                 </a:solidFill>
@@ -17669,27 +17685,27 @@
         </p:nvSpPr>
         <p:spPr>
           <a:xfrm>
-            <a:off x="731520" y="3063240"/>
-            <a:ext cx="5669280" cy="914400"/>
-          </a:xfrm>
-          <a:prstGeom prst="rect">
-            <a:avLst/>
-          </a:prstGeom>
-          <a:noFill/>
-        </p:spPr>
-        <p:txBody>
-          <a:bodyPr wrap="square" lIns="18288" rIns="18288" tIns="18288" bIns="18288" anchor="t">
-            <a:spAutoFit/>
-          </a:bodyPr>
-          <a:lstStyle/>
-          <a:p>
-            <a:pPr algn="l">
-              <a:lnSpc>
-                <a:spcPct val="112000"/>
-              </a:lnSpc>
-            </a:pPr>
-            <a:r>
-              <a:rPr sz="4000" b="1" i="0">
+            <a:off x="731520" y="2926080"/>
+            <a:ext cx="5760720" cy="1371600"/>
+          </a:xfrm>
+          <a:prstGeom prst="rect">
+            <a:avLst/>
+          </a:prstGeom>
+          <a:noFill/>
+        </p:spPr>
+        <p:txBody>
+          <a:bodyPr wrap="square" lIns="18288" rIns="18288" tIns="18288" bIns="18288" anchor="t">
+            <a:spAutoFit/>
+          </a:bodyPr>
+          <a:lstStyle/>
+          <a:p>
+            <a:pPr algn="l">
+              <a:lnSpc>
+                <a:spcPct val="100000"/>
+              </a:lnSpc>
+            </a:pPr>
+            <a:r>
+              <a:rPr sz="3400" b="1" i="0">
                 <a:solidFill>
                   <a:srgbClr val="FFFFFF"/>
                 </a:solidFill>
@@ -17708,7 +17724,7 @@
         </p:nvSpPr>
         <p:spPr>
           <a:xfrm>
-            <a:off x="731520" y="4069080"/>
+            <a:off x="731520" y="4434840"/>
             <a:ext cx="5486400" cy="1280160"/>
           </a:xfrm>
           <a:prstGeom prst="rect">
@@ -17728,7 +17744,7 @@
               </a:lnSpc>
             </a:pPr>
             <a:r>
-              <a:rPr sz="1600" b="0" i="0">
+              <a:rPr sz="1500" b="0" i="0">
                 <a:solidFill>
                   <a:srgbClr val="A1A1A8"/>
                 </a:solidFill>
@@ -23183,27 +23199,27 @@
         </p:nvSpPr>
         <p:spPr>
           <a:xfrm>
-            <a:off x="731520" y="3063240"/>
-            <a:ext cx="5669280" cy="914400"/>
-          </a:xfrm>
-          <a:prstGeom prst="rect">
-            <a:avLst/>
-          </a:prstGeom>
-          <a:noFill/>
-        </p:spPr>
-        <p:txBody>
-          <a:bodyPr wrap="square" lIns="18288" rIns="18288" tIns="18288" bIns="18288" anchor="t">
-            <a:spAutoFit/>
-          </a:bodyPr>
-          <a:lstStyle/>
-          <a:p>
-            <a:pPr algn="l">
-              <a:lnSpc>
-                <a:spcPct val="112000"/>
-              </a:lnSpc>
-            </a:pPr>
-            <a:r>
-              <a:rPr sz="4000" b="1" i="0">
+            <a:off x="731520" y="2926080"/>
+            <a:ext cx="5760720" cy="1371600"/>
+          </a:xfrm>
+          <a:prstGeom prst="rect">
+            <a:avLst/>
+          </a:prstGeom>
+          <a:noFill/>
+        </p:spPr>
+        <p:txBody>
+          <a:bodyPr wrap="square" lIns="18288" rIns="18288" tIns="18288" bIns="18288" anchor="t">
+            <a:spAutoFit/>
+          </a:bodyPr>
+          <a:lstStyle/>
+          <a:p>
+            <a:pPr algn="l">
+              <a:lnSpc>
+                <a:spcPct val="100000"/>
+              </a:lnSpc>
+            </a:pPr>
+            <a:r>
+              <a:rPr sz="3400" b="1" i="0">
                 <a:solidFill>
                   <a:srgbClr val="FFFFFF"/>
                 </a:solidFill>
@@ -23222,7 +23238,7 @@
         </p:nvSpPr>
         <p:spPr>
           <a:xfrm>
-            <a:off x="731520" y="4069080"/>
+            <a:off x="731520" y="4434840"/>
             <a:ext cx="5486400" cy="1280160"/>
           </a:xfrm>
           <a:prstGeom prst="rect">
@@ -23242,7 +23258,7 @@
               </a:lnSpc>
             </a:pPr>
             <a:r>
-              <a:rPr sz="1600" b="0" i="0">
+              <a:rPr sz="1500" b="0" i="0">
                 <a:solidFill>
                   <a:srgbClr val="A1A1A8"/>
                 </a:solidFill>
@@ -30207,27 +30223,27 @@
         </p:nvSpPr>
         <p:spPr>
           <a:xfrm>
-            <a:off x="731520" y="3063240"/>
-            <a:ext cx="5669280" cy="914400"/>
-          </a:xfrm>
-          <a:prstGeom prst="rect">
-            <a:avLst/>
-          </a:prstGeom>
-          <a:noFill/>
-        </p:spPr>
-        <p:txBody>
-          <a:bodyPr wrap="square" lIns="18288" rIns="18288" tIns="18288" bIns="18288" anchor="t">
-            <a:spAutoFit/>
-          </a:bodyPr>
-          <a:lstStyle/>
-          <a:p>
-            <a:pPr algn="l">
-              <a:lnSpc>
-                <a:spcPct val="112000"/>
-              </a:lnSpc>
-            </a:pPr>
-            <a:r>
-              <a:rPr sz="4000" b="1" i="0">
+            <a:off x="731520" y="2926080"/>
+            <a:ext cx="5760720" cy="1371600"/>
+          </a:xfrm>
+          <a:prstGeom prst="rect">
+            <a:avLst/>
+          </a:prstGeom>
+          <a:noFill/>
+        </p:spPr>
+        <p:txBody>
+          <a:bodyPr wrap="square" lIns="18288" rIns="18288" tIns="18288" bIns="18288" anchor="t">
+            <a:spAutoFit/>
+          </a:bodyPr>
+          <a:lstStyle/>
+          <a:p>
+            <a:pPr algn="l">
+              <a:lnSpc>
+                <a:spcPct val="100000"/>
+              </a:lnSpc>
+            </a:pPr>
+            <a:r>
+              <a:rPr sz="3400" b="1" i="0">
                 <a:solidFill>
                   <a:srgbClr val="FFFFFF"/>
                 </a:solidFill>
@@ -30246,7 +30262,7 @@
         </p:nvSpPr>
         <p:spPr>
           <a:xfrm>
-            <a:off x="731520" y="4069080"/>
+            <a:off x="731520" y="4434840"/>
             <a:ext cx="5486400" cy="1280160"/>
           </a:xfrm>
           <a:prstGeom prst="rect">
@@ -30266,7 +30282,7 @@
               </a:lnSpc>
             </a:pPr>
             <a:r>
-              <a:rPr sz="1600" b="0" i="0">
+              <a:rPr sz="1500" b="0" i="0">
                 <a:solidFill>
                   <a:srgbClr val="A1A1A8"/>
                 </a:solidFill>
@@ -35617,27 +35633,27 @@
         </p:nvSpPr>
         <p:spPr>
           <a:xfrm>
-            <a:off x="731520" y="3063240"/>
-            <a:ext cx="5669280" cy="914400"/>
-          </a:xfrm>
-          <a:prstGeom prst="rect">
-            <a:avLst/>
-          </a:prstGeom>
-          <a:noFill/>
-        </p:spPr>
-        <p:txBody>
-          <a:bodyPr wrap="square" lIns="18288" rIns="18288" tIns="18288" bIns="18288" anchor="t">
-            <a:spAutoFit/>
-          </a:bodyPr>
-          <a:lstStyle/>
-          <a:p>
-            <a:pPr algn="l">
-              <a:lnSpc>
-                <a:spcPct val="112000"/>
-              </a:lnSpc>
-            </a:pPr>
-            <a:r>
-              <a:rPr sz="4000" b="1" i="0">
+            <a:off x="731520" y="2926080"/>
+            <a:ext cx="5760720" cy="1371600"/>
+          </a:xfrm>
+          <a:prstGeom prst="rect">
+            <a:avLst/>
+          </a:prstGeom>
+          <a:noFill/>
+        </p:spPr>
+        <p:txBody>
+          <a:bodyPr wrap="square" lIns="18288" rIns="18288" tIns="18288" bIns="18288" anchor="t">
+            <a:spAutoFit/>
+          </a:bodyPr>
+          <a:lstStyle/>
+          <a:p>
+            <a:pPr algn="l">
+              <a:lnSpc>
+                <a:spcPct val="100000"/>
+              </a:lnSpc>
+            </a:pPr>
+            <a:r>
+              <a:rPr sz="3400" b="1" i="0">
                 <a:solidFill>
                   <a:srgbClr val="FFFFFF"/>
                 </a:solidFill>
@@ -35656,7 +35672,7 @@
         </p:nvSpPr>
         <p:spPr>
           <a:xfrm>
-            <a:off x="731520" y="4069080"/>
+            <a:off x="731520" y="4434840"/>
             <a:ext cx="5486400" cy="1280160"/>
           </a:xfrm>
           <a:prstGeom prst="rect">
@@ -35676,7 +35692,7 @@
               </a:lnSpc>
             </a:pPr>
             <a:r>
-              <a:rPr sz="1600" b="0" i="0">
+              <a:rPr sz="1500" b="0" i="0">
                 <a:solidFill>
                   <a:srgbClr val="A1A1A8"/>
                 </a:solidFill>

--- a/kahi/2026-10-24_kahi-lumumba-linkedin-instagram-analyse-veille-strategie.pptx
+++ b/kahi/2026-10-24_kahi-lumumba-linkedin-instagram-analyse-veille-strategie.pptx
@@ -3395,7 +3395,6 @@
                   <a:srgbClr val="FFFFFF"/>
                 </a:solidFill>
                 <a:latin typeface="Montserrat"/>
-                <a:hlinkClick r:id="rId4"/>
               </a:rPr>
               <a:t>linkedin.com/in/kahilumumba</a:t>
             </a:r>
@@ -3412,7 +3411,6 @@
                   <a:srgbClr val="FFFFFF"/>
                 </a:solidFill>
                 <a:latin typeface="Montserrat"/>
-                <a:hlinkClick r:id="rId5"/>
               </a:rPr>
               <a:t>instagram.com/kahindula61</a:t>
             </a:r>
@@ -9073,7 +9071,7 @@
         </p:blipFill>
         <p:spPr>
           <a:xfrm>
-            <a:off x="731520" y="5897880"/>
+            <a:off x="731520" y="5669280"/>
             <a:ext cx="1092631" cy="548640"/>
           </a:xfrm>
           <a:prstGeom prst="rect">
@@ -14686,8 +14684,8 @@
         </p:blipFill>
         <p:spPr>
           <a:xfrm>
-            <a:off x="6702552" y="0"/>
-            <a:ext cx="5486400" cy="6858000"/>
+            <a:off x="6702552" y="685800"/>
+            <a:ext cx="5486400" cy="5486400"/>
           </a:xfrm>
           <a:prstGeom prst="rect">
             <a:avLst/>
@@ -14871,7 +14869,7 @@
         </p:blipFill>
         <p:spPr>
           <a:xfrm>
-            <a:off x="731520" y="5897880"/>
+            <a:off x="731520" y="5669280"/>
             <a:ext cx="1092631" cy="548640"/>
           </a:xfrm>
           <a:prstGeom prst="rect">
@@ -17771,7 +17769,7 @@
         </p:blipFill>
         <p:spPr>
           <a:xfrm>
-            <a:off x="731520" y="5897880"/>
+            <a:off x="731520" y="5669280"/>
             <a:ext cx="1092631" cy="548640"/>
           </a:xfrm>
           <a:prstGeom prst="rect">
@@ -23285,7 +23283,7 @@
         </p:blipFill>
         <p:spPr>
           <a:xfrm>
-            <a:off x="731520" y="5897880"/>
+            <a:off x="731520" y="5669280"/>
             <a:ext cx="1092631" cy="548640"/>
           </a:xfrm>
           <a:prstGeom prst="rect">
@@ -30309,7 +30307,7 @@
         </p:blipFill>
         <p:spPr>
           <a:xfrm>
-            <a:off x="731520" y="5897880"/>
+            <a:off x="731520" y="5669280"/>
             <a:ext cx="1092631" cy="548640"/>
           </a:xfrm>
           <a:prstGeom prst="rect">
@@ -31916,7 +31914,6 @@
                   <a:srgbClr val="B6D401"/>
                 </a:solidFill>
                 <a:latin typeface="Montserrat"/>
-                <a:hlinkClick r:id="rId3"/>
               </a:rPr>
               <a:t>linkedin.com/in/kahilumumba</a:t>
             </a:r>
@@ -31935,7 +31932,6 @@
                   <a:srgbClr val="B6D401"/>
                 </a:solidFill>
                 <a:latin typeface="Montserrat"/>
-                <a:hlinkClick r:id="rId4"/>
               </a:rPr>
               <a:t>instagram.com/kahindula61</a:t>
             </a:r>
@@ -35719,7 +35715,7 @@
         </p:blipFill>
         <p:spPr>
           <a:xfrm>
-            <a:off x="731520" y="5897880"/>
+            <a:off x="731520" y="5669280"/>
             <a:ext cx="1092631" cy="548640"/>
           </a:xfrm>
           <a:prstGeom prst="rect">
